--- a/AI_Chat_Platform_项目文档_v3.pptx
+++ b/AI_Chat_Platform_项目文档_v3.pptx
@@ -3075,7 +3075,7 @@
         <p:spPr>
           <a:xfrm>
             <a:off x="457200" y="1188720"/>
-            <a:ext cx="4114800" cy="1554480"/>
+            <a:ext cx="3931920" cy="1554480"/>
           </a:xfrm>
           <a:prstGeom prst="rect">
             <a:avLst/>
@@ -3127,7 +3127,7 @@
         <p:spPr>
           <a:xfrm>
             <a:off x="640080" y="1325880"/>
-            <a:ext cx="3749040" cy="365760"/>
+            <a:ext cx="3566160" cy="365760"/>
           </a:xfrm>
           <a:prstGeom prst="rect">
             <a:avLst/>
@@ -3166,7 +3166,7 @@
         <p:spPr>
           <a:xfrm>
             <a:off x="640080" y="1737360"/>
-            <a:ext cx="3749040" cy="822960"/>
+            <a:ext cx="3566160" cy="822960"/>
           </a:xfrm>
           <a:prstGeom prst="rect">
             <a:avLst/>
@@ -3221,8 +3221,8 @@
         </p:nvSpPr>
         <p:spPr>
           <a:xfrm>
-            <a:off x="4754880" y="1188720"/>
-            <a:ext cx="4114800" cy="1554480"/>
+            <a:off x="4846320" y="1188720"/>
+            <a:ext cx="3931920" cy="1554480"/>
           </a:xfrm>
           <a:prstGeom prst="rect">
             <a:avLst/>
@@ -3253,7 +3253,7 @@
         </p:nvSpPr>
         <p:spPr>
           <a:xfrm>
-            <a:off x="4754880" y="1188720"/>
+            <a:off x="4846320" y="1188720"/>
             <a:ext cx="54864" cy="1554480"/>
           </a:xfrm>
           <a:prstGeom prst="rect">
@@ -3273,8 +3273,8 @@
         </p:nvSpPr>
         <p:spPr>
           <a:xfrm>
-            <a:off x="4937760" y="1325880"/>
-            <a:ext cx="3749040" cy="365760"/>
+            <a:off x="5029200" y="1325880"/>
+            <a:ext cx="3566160" cy="365760"/>
           </a:xfrm>
           <a:prstGeom prst="rect">
             <a:avLst/>
@@ -3312,8 +3312,8 @@
         </p:nvSpPr>
         <p:spPr>
           <a:xfrm>
-            <a:off x="4937760" y="1737360"/>
-            <a:ext cx="3749040" cy="822960"/>
+            <a:off x="5029200" y="1737360"/>
+            <a:ext cx="3566160" cy="822960"/>
           </a:xfrm>
           <a:prstGeom prst="rect">
             <a:avLst/>
@@ -3386,7 +3386,7 @@
         <p:spPr>
           <a:xfrm>
             <a:off x="457200" y="3017520"/>
-            <a:ext cx="4114800" cy="1554480"/>
+            <a:ext cx="3931920" cy="1554480"/>
           </a:xfrm>
           <a:prstGeom prst="rect">
             <a:avLst/>
@@ -3438,7 +3438,7 @@
         <p:spPr>
           <a:xfrm>
             <a:off x="640080" y="3154680"/>
-            <a:ext cx="3749040" cy="365760"/>
+            <a:ext cx="3566160" cy="365760"/>
           </a:xfrm>
           <a:prstGeom prst="rect">
             <a:avLst/>
@@ -3477,7 +3477,7 @@
         <p:spPr>
           <a:xfrm>
             <a:off x="640080" y="3566160"/>
-            <a:ext cx="3749040" cy="822960"/>
+            <a:ext cx="3566160" cy="822960"/>
           </a:xfrm>
           <a:prstGeom prst="rect">
             <a:avLst/>
@@ -3549,8 +3549,8 @@
         </p:nvSpPr>
         <p:spPr>
           <a:xfrm>
-            <a:off x="4754880" y="3017520"/>
-            <a:ext cx="4114800" cy="1554480"/>
+            <a:off x="4846320" y="3017520"/>
+            <a:ext cx="3931920" cy="1554480"/>
           </a:xfrm>
           <a:prstGeom prst="rect">
             <a:avLst/>
@@ -3581,7 +3581,7 @@
         </p:nvSpPr>
         <p:spPr>
           <a:xfrm>
-            <a:off x="4754880" y="3017520"/>
+            <a:off x="4846320" y="3017520"/>
             <a:ext cx="54864" cy="1554480"/>
           </a:xfrm>
           <a:prstGeom prst="rect">
@@ -3601,8 +3601,8 @@
         </p:nvSpPr>
         <p:spPr>
           <a:xfrm>
-            <a:off x="4937760" y="3154680"/>
-            <a:ext cx="3749040" cy="365760"/>
+            <a:off x="5029200" y="3154680"/>
+            <a:ext cx="3566160" cy="365760"/>
           </a:xfrm>
           <a:prstGeom prst="rect">
             <a:avLst/>
@@ -3640,8 +3640,8 @@
         </p:nvSpPr>
         <p:spPr>
           <a:xfrm>
-            <a:off x="4937760" y="3566160"/>
-            <a:ext cx="3749040" cy="822960"/>
+            <a:off x="5029200" y="3566160"/>
+            <a:ext cx="3566160" cy="822960"/>
           </a:xfrm>
           <a:prstGeom prst="rect">
             <a:avLst/>
@@ -4003,11 +4003,11 @@
         <p:spPr>
           <a:xfrm>
             <a:off x="457200" y="1188720"/>
-            <a:ext cx="2651760" cy="1097280"/>
+            <a:ext cx="2560320" cy="1005840"/>
           </a:xfrm>
           <a:prstGeom prst="rect">
             <a:avLst>
-              <a:gd name="adj" fmla="val 6667"/>
+              <a:gd name="adj" fmla="val 7273"/>
             </a:avLst>
           </a:prstGeom>
           <a:solidFill>
@@ -4031,8 +4031,8 @@
         </p:nvSpPr>
         <p:spPr>
           <a:xfrm>
-            <a:off x="457200" y="1280160"/>
-            <a:ext cx="2651760" cy="457200"/>
+            <a:off x="457200" y="1261872"/>
+            <a:ext cx="2560320" cy="411480"/>
           </a:xfrm>
           <a:prstGeom prst="rect">
             <a:avLst/>
@@ -4070,8 +4070,8 @@
         </p:nvSpPr>
         <p:spPr>
           <a:xfrm>
-            <a:off x="457200" y="1737360"/>
-            <a:ext cx="2651760" cy="411480"/>
+            <a:off x="457200" y="1691640"/>
+            <a:ext cx="2560320" cy="365760"/>
           </a:xfrm>
           <a:prstGeom prst="rect">
             <a:avLst/>
@@ -4109,12 +4109,12 @@
         </p:nvSpPr>
         <p:spPr>
           <a:xfrm>
-            <a:off x="3291840" y="1188720"/>
-            <a:ext cx="2651760" cy="1097280"/>
+            <a:off x="3383280" y="1188720"/>
+            <a:ext cx="2560320" cy="1005840"/>
           </a:xfrm>
           <a:prstGeom prst="rect">
             <a:avLst>
-              <a:gd name="adj" fmla="val 6667"/>
+              <a:gd name="adj" fmla="val 7273"/>
             </a:avLst>
           </a:prstGeom>
           <a:solidFill>
@@ -4138,8 +4138,8 @@
         </p:nvSpPr>
         <p:spPr>
           <a:xfrm>
-            <a:off x="3291840" y="1280160"/>
-            <a:ext cx="2651760" cy="457200"/>
+            <a:off x="3383280" y="1261872"/>
+            <a:ext cx="2560320" cy="411480"/>
           </a:xfrm>
           <a:prstGeom prst="rect">
             <a:avLst/>
@@ -4177,8 +4177,8 @@
         </p:nvSpPr>
         <p:spPr>
           <a:xfrm>
-            <a:off x="3291840" y="1737360"/>
-            <a:ext cx="2651760" cy="411480"/>
+            <a:off x="3383280" y="1691640"/>
+            <a:ext cx="2560320" cy="365760"/>
           </a:xfrm>
           <a:prstGeom prst="rect">
             <a:avLst/>
@@ -4216,12 +4216,12 @@
         </p:nvSpPr>
         <p:spPr>
           <a:xfrm>
-            <a:off x="6126480" y="1188720"/>
-            <a:ext cx="2651760" cy="1097280"/>
+            <a:off x="6309360" y="1188720"/>
+            <a:ext cx="2560320" cy="1005840"/>
           </a:xfrm>
           <a:prstGeom prst="rect">
             <a:avLst>
-              <a:gd name="adj" fmla="val 6667"/>
+              <a:gd name="adj" fmla="val 7273"/>
             </a:avLst>
           </a:prstGeom>
           <a:solidFill>
@@ -4245,8 +4245,8 @@
         </p:nvSpPr>
         <p:spPr>
           <a:xfrm>
-            <a:off x="6126480" y="1280160"/>
-            <a:ext cx="2651760" cy="457200"/>
+            <a:off x="6309360" y="1261872"/>
+            <a:ext cx="2560320" cy="411480"/>
           </a:xfrm>
           <a:prstGeom prst="rect">
             <a:avLst/>
@@ -4284,8 +4284,8 @@
         </p:nvSpPr>
         <p:spPr>
           <a:xfrm>
-            <a:off x="6126480" y="1737360"/>
-            <a:ext cx="2651760" cy="411480"/>
+            <a:off x="6309360" y="1691640"/>
+            <a:ext cx="2560320" cy="365760"/>
           </a:xfrm>
           <a:prstGeom prst="rect">
             <a:avLst/>
@@ -4323,12 +4323,12 @@
         </p:nvSpPr>
         <p:spPr>
           <a:xfrm>
-            <a:off x="457200" y="2560320"/>
-            <a:ext cx="2651760" cy="1097280"/>
+            <a:off x="457200" y="2468880"/>
+            <a:ext cx="2560320" cy="1005840"/>
           </a:xfrm>
           <a:prstGeom prst="rect">
             <a:avLst>
-              <a:gd name="adj" fmla="val 6667"/>
+              <a:gd name="adj" fmla="val 7273"/>
             </a:avLst>
           </a:prstGeom>
           <a:solidFill>
@@ -4352,8 +4352,8 @@
         </p:nvSpPr>
         <p:spPr>
           <a:xfrm>
-            <a:off x="457200" y="2651760"/>
-            <a:ext cx="2651760" cy="457200"/>
+            <a:off x="457200" y="2542032"/>
+            <a:ext cx="2560320" cy="411480"/>
           </a:xfrm>
           <a:prstGeom prst="rect">
             <a:avLst/>
@@ -4391,8 +4391,8 @@
         </p:nvSpPr>
         <p:spPr>
           <a:xfrm>
-            <a:off x="457200" y="3108960"/>
-            <a:ext cx="2651760" cy="411480"/>
+            <a:off x="457200" y="2971800"/>
+            <a:ext cx="2560320" cy="365760"/>
           </a:xfrm>
           <a:prstGeom prst="rect">
             <a:avLst/>
@@ -4430,12 +4430,12 @@
         </p:nvSpPr>
         <p:spPr>
           <a:xfrm>
-            <a:off x="3291840" y="2560320"/>
-            <a:ext cx="2651760" cy="1097280"/>
+            <a:off x="3383280" y="2468880"/>
+            <a:ext cx="2560320" cy="1005840"/>
           </a:xfrm>
           <a:prstGeom prst="rect">
             <a:avLst>
-              <a:gd name="adj" fmla="val 6667"/>
+              <a:gd name="adj" fmla="val 7273"/>
             </a:avLst>
           </a:prstGeom>
           <a:solidFill>
@@ -4459,8 +4459,8 @@
         </p:nvSpPr>
         <p:spPr>
           <a:xfrm>
-            <a:off x="3291840" y="2651760"/>
-            <a:ext cx="2651760" cy="457200"/>
+            <a:off x="3383280" y="2542032"/>
+            <a:ext cx="2560320" cy="411480"/>
           </a:xfrm>
           <a:prstGeom prst="rect">
             <a:avLst/>
@@ -4498,8 +4498,8 @@
         </p:nvSpPr>
         <p:spPr>
           <a:xfrm>
-            <a:off x="3291840" y="3108960"/>
-            <a:ext cx="2651760" cy="411480"/>
+            <a:off x="3383280" y="2971800"/>
+            <a:ext cx="2560320" cy="365760"/>
           </a:xfrm>
           <a:prstGeom prst="rect">
             <a:avLst/>
@@ -4537,12 +4537,12 @@
         </p:nvSpPr>
         <p:spPr>
           <a:xfrm>
-            <a:off x="6126480" y="2560320"/>
-            <a:ext cx="2651760" cy="1097280"/>
+            <a:off x="6309360" y="2468880"/>
+            <a:ext cx="2560320" cy="1005840"/>
           </a:xfrm>
           <a:prstGeom prst="rect">
             <a:avLst>
-              <a:gd name="adj" fmla="val 6667"/>
+              <a:gd name="adj" fmla="val 7273"/>
             </a:avLst>
           </a:prstGeom>
           <a:solidFill>
@@ -4566,8 +4566,8 @@
         </p:nvSpPr>
         <p:spPr>
           <a:xfrm>
-            <a:off x="6126480" y="2651760"/>
-            <a:ext cx="2651760" cy="457200"/>
+            <a:off x="6309360" y="2542032"/>
+            <a:ext cx="2560320" cy="411480"/>
           </a:xfrm>
           <a:prstGeom prst="rect">
             <a:avLst/>
@@ -4605,8 +4605,8 @@
         </p:nvSpPr>
         <p:spPr>
           <a:xfrm>
-            <a:off x="6126480" y="3108960"/>
-            <a:ext cx="2651760" cy="411480"/>
+            <a:off x="6309360" y="2971800"/>
+            <a:ext cx="2560320" cy="365760"/>
           </a:xfrm>
           <a:prstGeom prst="rect">
             <a:avLst/>
@@ -4644,12 +4644,12 @@
         </p:nvSpPr>
         <p:spPr>
           <a:xfrm>
-            <a:off x="457200" y="3931920"/>
-            <a:ext cx="2651760" cy="1097280"/>
+            <a:off x="457200" y="3749040"/>
+            <a:ext cx="2560320" cy="1005840"/>
           </a:xfrm>
           <a:prstGeom prst="rect">
             <a:avLst>
-              <a:gd name="adj" fmla="val 6667"/>
+              <a:gd name="adj" fmla="val 7273"/>
             </a:avLst>
           </a:prstGeom>
           <a:solidFill>
@@ -4673,8 +4673,8 @@
         </p:nvSpPr>
         <p:spPr>
           <a:xfrm>
-            <a:off x="457200" y="4023360"/>
-            <a:ext cx="2651760" cy="457200"/>
+            <a:off x="457200" y="3822192"/>
+            <a:ext cx="2560320" cy="411480"/>
           </a:xfrm>
           <a:prstGeom prst="rect">
             <a:avLst/>
@@ -4712,8 +4712,8 @@
         </p:nvSpPr>
         <p:spPr>
           <a:xfrm>
-            <a:off x="457200" y="4480560"/>
-            <a:ext cx="2651760" cy="411480"/>
+            <a:off x="457200" y="4251960"/>
+            <a:ext cx="2560320" cy="365760"/>
           </a:xfrm>
           <a:prstGeom prst="rect">
             <a:avLst/>
@@ -4751,12 +4751,12 @@
         </p:nvSpPr>
         <p:spPr>
           <a:xfrm>
-            <a:off x="3291840" y="3931920"/>
-            <a:ext cx="2651760" cy="1097280"/>
+            <a:off x="3383280" y="3749040"/>
+            <a:ext cx="2560320" cy="1005840"/>
           </a:xfrm>
           <a:prstGeom prst="rect">
             <a:avLst>
-              <a:gd name="adj" fmla="val 6667"/>
+              <a:gd name="adj" fmla="val 7273"/>
             </a:avLst>
           </a:prstGeom>
           <a:solidFill>
@@ -4780,8 +4780,8 @@
         </p:nvSpPr>
         <p:spPr>
           <a:xfrm>
-            <a:off x="3291840" y="4023360"/>
-            <a:ext cx="2651760" cy="457200"/>
+            <a:off x="3383280" y="3822192"/>
+            <a:ext cx="2560320" cy="411480"/>
           </a:xfrm>
           <a:prstGeom prst="rect">
             <a:avLst/>
@@ -4819,8 +4819,8 @@
         </p:nvSpPr>
         <p:spPr>
           <a:xfrm>
-            <a:off x="3291840" y="4480560"/>
-            <a:ext cx="2651760" cy="411480"/>
+            <a:off x="3383280" y="4251960"/>
+            <a:ext cx="2560320" cy="365760"/>
           </a:xfrm>
           <a:prstGeom prst="rect">
             <a:avLst/>
@@ -4858,12 +4858,12 @@
         </p:nvSpPr>
         <p:spPr>
           <a:xfrm>
-            <a:off x="6126480" y="3931920"/>
-            <a:ext cx="2651760" cy="1097280"/>
+            <a:off x="6309360" y="3749040"/>
+            <a:ext cx="2560320" cy="1005840"/>
           </a:xfrm>
           <a:prstGeom prst="rect">
             <a:avLst>
-              <a:gd name="adj" fmla="val 6667"/>
+              <a:gd name="adj" fmla="val 7273"/>
             </a:avLst>
           </a:prstGeom>
           <a:solidFill>
@@ -4887,8 +4887,8 @@
         </p:nvSpPr>
         <p:spPr>
           <a:xfrm>
-            <a:off x="6126480" y="4023360"/>
-            <a:ext cx="2651760" cy="457200"/>
+            <a:off x="6309360" y="3822192"/>
+            <a:ext cx="2560320" cy="411480"/>
           </a:xfrm>
           <a:prstGeom prst="rect">
             <a:avLst/>
@@ -4926,8 +4926,8 @@
         </p:nvSpPr>
         <p:spPr>
           <a:xfrm>
-            <a:off x="6126480" y="4480560"/>
-            <a:ext cx="2651760" cy="411480"/>
+            <a:off x="6309360" y="4251960"/>
+            <a:ext cx="2560320" cy="365760"/>
           </a:xfrm>
           <a:prstGeom prst="rect">
             <a:avLst/>
@@ -5057,7 +5057,7 @@
         <p:spPr>
           <a:xfrm>
             <a:off x="457200" y="1188720"/>
-            <a:ext cx="2651760" cy="1554480"/>
+            <a:ext cx="2560320" cy="1554480"/>
           </a:xfrm>
           <a:prstGeom prst="rect">
             <a:avLst>
@@ -5086,7 +5086,7 @@
         <p:spPr>
           <a:xfrm>
             <a:off x="457200" y="1188720"/>
-            <a:ext cx="2651760" cy="54864"/>
+            <a:ext cx="2560320" cy="54864"/>
           </a:xfrm>
           <a:prstGeom prst="rect">
             <a:avLst/>
@@ -5106,7 +5106,7 @@
         <p:spPr>
           <a:xfrm>
             <a:off x="594360" y="1325880"/>
-            <a:ext cx="2377440" cy="365760"/>
+            <a:ext cx="2286000" cy="365760"/>
           </a:xfrm>
           <a:prstGeom prst="rect">
             <a:avLst/>
@@ -5145,7 +5145,7 @@
         <p:spPr>
           <a:xfrm>
             <a:off x="594360" y="1691640"/>
-            <a:ext cx="2377440" cy="914400"/>
+            <a:ext cx="2286000" cy="914400"/>
           </a:xfrm>
           <a:prstGeom prst="rect">
             <a:avLst/>
@@ -5200,8 +5200,8 @@
         </p:nvSpPr>
         <p:spPr>
           <a:xfrm>
-            <a:off x="3291840" y="1188720"/>
-            <a:ext cx="2651760" cy="1554480"/>
+            <a:off x="3383280" y="1188720"/>
+            <a:ext cx="2560320" cy="1554480"/>
           </a:xfrm>
           <a:prstGeom prst="rect">
             <a:avLst>
@@ -5229,8 +5229,8 @@
         </p:nvSpPr>
         <p:spPr>
           <a:xfrm>
-            <a:off x="3291840" y="1188720"/>
-            <a:ext cx="2651760" cy="54864"/>
+            <a:off x="3383280" y="1188720"/>
+            <a:ext cx="2560320" cy="54864"/>
           </a:xfrm>
           <a:prstGeom prst="rect">
             <a:avLst/>
@@ -5249,8 +5249,8 @@
         </p:nvSpPr>
         <p:spPr>
           <a:xfrm>
-            <a:off x="3429000" y="1325880"/>
-            <a:ext cx="2377440" cy="365760"/>
+            <a:off x="3520440" y="1325880"/>
+            <a:ext cx="2286000" cy="365760"/>
           </a:xfrm>
           <a:prstGeom prst="rect">
             <a:avLst/>
@@ -5288,8 +5288,8 @@
         </p:nvSpPr>
         <p:spPr>
           <a:xfrm>
-            <a:off x="3429000" y="1691640"/>
-            <a:ext cx="2377440" cy="914400"/>
+            <a:off x="3520440" y="1691640"/>
+            <a:ext cx="2286000" cy="914400"/>
           </a:xfrm>
           <a:prstGeom prst="rect">
             <a:avLst/>
@@ -5344,8 +5344,8 @@
         </p:nvSpPr>
         <p:spPr>
           <a:xfrm>
-            <a:off x="6126480" y="1188720"/>
-            <a:ext cx="2651760" cy="1554480"/>
+            <a:off x="6309360" y="1188720"/>
+            <a:ext cx="2560320" cy="1554480"/>
           </a:xfrm>
           <a:prstGeom prst="rect">
             <a:avLst>
@@ -5373,8 +5373,8 @@
         </p:nvSpPr>
         <p:spPr>
           <a:xfrm>
-            <a:off x="6126480" y="1188720"/>
-            <a:ext cx="2651760" cy="54864"/>
+            <a:off x="6309360" y="1188720"/>
+            <a:ext cx="2560320" cy="54864"/>
           </a:xfrm>
           <a:prstGeom prst="rect">
             <a:avLst/>
@@ -5393,8 +5393,8 @@
         </p:nvSpPr>
         <p:spPr>
           <a:xfrm>
-            <a:off x="6263640" y="1325880"/>
-            <a:ext cx="2377440" cy="365760"/>
+            <a:off x="6446520" y="1325880"/>
+            <a:ext cx="2286000" cy="365760"/>
           </a:xfrm>
           <a:prstGeom prst="rect">
             <a:avLst/>
@@ -5432,8 +5432,8 @@
         </p:nvSpPr>
         <p:spPr>
           <a:xfrm>
-            <a:off x="6263640" y="1691640"/>
-            <a:ext cx="2377440" cy="914400"/>
+            <a:off x="6446520" y="1691640"/>
+            <a:ext cx="2286000" cy="914400"/>
           </a:xfrm>
           <a:prstGeom prst="rect">
             <a:avLst/>
@@ -5489,7 +5489,7 @@
         <p:spPr>
           <a:xfrm>
             <a:off x="457200" y="3017520"/>
-            <a:ext cx="2651760" cy="1554480"/>
+            <a:ext cx="2560320" cy="1554480"/>
           </a:xfrm>
           <a:prstGeom prst="rect">
             <a:avLst>
@@ -5518,7 +5518,7 @@
         <p:spPr>
           <a:xfrm>
             <a:off x="457200" y="3017520"/>
-            <a:ext cx="2651760" cy="54864"/>
+            <a:ext cx="2560320" cy="54864"/>
           </a:xfrm>
           <a:prstGeom prst="rect">
             <a:avLst/>
@@ -5538,7 +5538,7 @@
         <p:spPr>
           <a:xfrm>
             <a:off x="594360" y="3154680"/>
-            <a:ext cx="2377440" cy="365760"/>
+            <a:ext cx="2286000" cy="365760"/>
           </a:xfrm>
           <a:prstGeom prst="rect">
             <a:avLst/>
@@ -5577,7 +5577,7 @@
         <p:spPr>
           <a:xfrm>
             <a:off x="594360" y="3520440"/>
-            <a:ext cx="2377440" cy="914400"/>
+            <a:ext cx="2286000" cy="914400"/>
           </a:xfrm>
           <a:prstGeom prst="rect">
             <a:avLst/>
@@ -5632,8 +5632,8 @@
         </p:nvSpPr>
         <p:spPr>
           <a:xfrm>
-            <a:off x="3291840" y="3017520"/>
-            <a:ext cx="2651760" cy="1554480"/>
+            <a:off x="3383280" y="3017520"/>
+            <a:ext cx="2560320" cy="1554480"/>
           </a:xfrm>
           <a:prstGeom prst="rect">
             <a:avLst>
@@ -5661,8 +5661,8 @@
         </p:nvSpPr>
         <p:spPr>
           <a:xfrm>
-            <a:off x="3291840" y="3017520"/>
-            <a:ext cx="2651760" cy="54864"/>
+            <a:off x="3383280" y="3017520"/>
+            <a:ext cx="2560320" cy="54864"/>
           </a:xfrm>
           <a:prstGeom prst="rect">
             <a:avLst/>
@@ -5681,8 +5681,8 @@
         </p:nvSpPr>
         <p:spPr>
           <a:xfrm>
-            <a:off x="3429000" y="3154680"/>
-            <a:ext cx="2377440" cy="365760"/>
+            <a:off x="3520440" y="3154680"/>
+            <a:ext cx="2286000" cy="365760"/>
           </a:xfrm>
           <a:prstGeom prst="rect">
             <a:avLst/>
@@ -5720,8 +5720,8 @@
         </p:nvSpPr>
         <p:spPr>
           <a:xfrm>
-            <a:off x="3429000" y="3520440"/>
-            <a:ext cx="2377440" cy="914400"/>
+            <a:off x="3520440" y="3520440"/>
+            <a:ext cx="2286000" cy="914400"/>
           </a:xfrm>
           <a:prstGeom prst="rect">
             <a:avLst/>
@@ -5776,8 +5776,8 @@
         </p:nvSpPr>
         <p:spPr>
           <a:xfrm>
-            <a:off x="6126480" y="3017520"/>
-            <a:ext cx="2651760" cy="1554480"/>
+            <a:off x="6309360" y="3017520"/>
+            <a:ext cx="2560320" cy="1554480"/>
           </a:xfrm>
           <a:prstGeom prst="rect">
             <a:avLst>
@@ -5805,8 +5805,8 @@
         </p:nvSpPr>
         <p:spPr>
           <a:xfrm>
-            <a:off x="6126480" y="3017520"/>
-            <a:ext cx="2651760" cy="54864"/>
+            <a:off x="6309360" y="3017520"/>
+            <a:ext cx="2560320" cy="54864"/>
           </a:xfrm>
           <a:prstGeom prst="rect">
             <a:avLst/>
@@ -5825,8 +5825,8 @@
         </p:nvSpPr>
         <p:spPr>
           <a:xfrm>
-            <a:off x="6263640" y="3154680"/>
-            <a:ext cx="2377440" cy="365760"/>
+            <a:off x="6446520" y="3154680"/>
+            <a:ext cx="2286000" cy="365760"/>
           </a:xfrm>
           <a:prstGeom prst="rect">
             <a:avLst/>
@@ -5864,8 +5864,8 @@
         </p:nvSpPr>
         <p:spPr>
           <a:xfrm>
-            <a:off x="6263640" y="3520440"/>
-            <a:ext cx="2377440" cy="914400"/>
+            <a:off x="6446520" y="3520440"/>
+            <a:ext cx="2286000" cy="914400"/>
           </a:xfrm>
           <a:prstGeom prst="rect">
             <a:avLst/>
@@ -6678,7 +6678,7 @@
         <p:spPr>
           <a:xfrm>
             <a:off x="457200" y="1188720"/>
-            <a:ext cx="2651760" cy="1554480"/>
+            <a:ext cx="2560320" cy="1554480"/>
           </a:xfrm>
           <a:prstGeom prst="rect">
             <a:avLst/>
@@ -6730,7 +6730,7 @@
         <p:spPr>
           <a:xfrm>
             <a:off x="640080" y="1325880"/>
-            <a:ext cx="2286000" cy="365760"/>
+            <a:ext cx="2194560" cy="365760"/>
           </a:xfrm>
           <a:prstGeom prst="rect">
             <a:avLst/>
@@ -6769,7 +6769,7 @@
         <p:spPr>
           <a:xfrm>
             <a:off x="640080" y="1737360"/>
-            <a:ext cx="2286000" cy="822960"/>
+            <a:ext cx="2194560" cy="822960"/>
           </a:xfrm>
           <a:prstGeom prst="rect">
             <a:avLst/>
@@ -6824,8 +6824,8 @@
         </p:nvSpPr>
         <p:spPr>
           <a:xfrm>
-            <a:off x="3291840" y="1188720"/>
-            <a:ext cx="2651760" cy="1554480"/>
+            <a:off x="3383280" y="1188720"/>
+            <a:ext cx="2560320" cy="1554480"/>
           </a:xfrm>
           <a:prstGeom prst="rect">
             <a:avLst/>
@@ -6856,7 +6856,7 @@
         </p:nvSpPr>
         <p:spPr>
           <a:xfrm>
-            <a:off x="3291840" y="1188720"/>
+            <a:off x="3383280" y="1188720"/>
             <a:ext cx="54864" cy="1554480"/>
           </a:xfrm>
           <a:prstGeom prst="rect">
@@ -6876,8 +6876,8 @@
         </p:nvSpPr>
         <p:spPr>
           <a:xfrm>
-            <a:off x="3474720" y="1325880"/>
-            <a:ext cx="2286000" cy="365760"/>
+            <a:off x="3566160" y="1325880"/>
+            <a:ext cx="2194560" cy="365760"/>
           </a:xfrm>
           <a:prstGeom prst="rect">
             <a:avLst/>
@@ -6915,8 +6915,8 @@
         </p:nvSpPr>
         <p:spPr>
           <a:xfrm>
-            <a:off x="3474720" y="1737360"/>
-            <a:ext cx="2286000" cy="822960"/>
+            <a:off x="3566160" y="1737360"/>
+            <a:ext cx="2194560" cy="822960"/>
           </a:xfrm>
           <a:prstGeom prst="rect">
             <a:avLst/>
@@ -6971,8 +6971,8 @@
         </p:nvSpPr>
         <p:spPr>
           <a:xfrm>
-            <a:off x="6126480" y="1188720"/>
-            <a:ext cx="2651760" cy="1554480"/>
+            <a:off x="6309360" y="1188720"/>
+            <a:ext cx="2560320" cy="1554480"/>
           </a:xfrm>
           <a:prstGeom prst="rect">
             <a:avLst/>
@@ -7003,7 +7003,7 @@
         </p:nvSpPr>
         <p:spPr>
           <a:xfrm>
-            <a:off x="6126480" y="1188720"/>
+            <a:off x="6309360" y="1188720"/>
             <a:ext cx="54864" cy="1554480"/>
           </a:xfrm>
           <a:prstGeom prst="rect">
@@ -7023,8 +7023,8 @@
         </p:nvSpPr>
         <p:spPr>
           <a:xfrm>
-            <a:off x="6309360" y="1325880"/>
-            <a:ext cx="2286000" cy="365760"/>
+            <a:off x="6492240" y="1325880"/>
+            <a:ext cx="2194560" cy="365760"/>
           </a:xfrm>
           <a:prstGeom prst="rect">
             <a:avLst/>
@@ -7062,8 +7062,8 @@
         </p:nvSpPr>
         <p:spPr>
           <a:xfrm>
-            <a:off x="6309360" y="1737360"/>
-            <a:ext cx="2286000" cy="822960"/>
+            <a:off x="6492240" y="1737360"/>
+            <a:ext cx="2194560" cy="822960"/>
           </a:xfrm>
           <a:prstGeom prst="rect">
             <a:avLst/>
@@ -7119,7 +7119,7 @@
         <p:spPr>
           <a:xfrm>
             <a:off x="457200" y="3017520"/>
-            <a:ext cx="2651760" cy="1554480"/>
+            <a:ext cx="2560320" cy="1554480"/>
           </a:xfrm>
           <a:prstGeom prst="rect">
             <a:avLst/>
@@ -7171,7 +7171,7 @@
         <p:spPr>
           <a:xfrm>
             <a:off x="640080" y="3154680"/>
-            <a:ext cx="2286000" cy="365760"/>
+            <a:ext cx="2194560" cy="365760"/>
           </a:xfrm>
           <a:prstGeom prst="rect">
             <a:avLst/>
@@ -7210,7 +7210,7 @@
         <p:spPr>
           <a:xfrm>
             <a:off x="640080" y="3566160"/>
-            <a:ext cx="2286000" cy="822960"/>
+            <a:ext cx="2194560" cy="822960"/>
           </a:xfrm>
           <a:prstGeom prst="rect">
             <a:avLst/>
@@ -7265,8 +7265,8 @@
         </p:nvSpPr>
         <p:spPr>
           <a:xfrm>
-            <a:off x="3291840" y="3017520"/>
-            <a:ext cx="2651760" cy="1554480"/>
+            <a:off x="3383280" y="3017520"/>
+            <a:ext cx="2560320" cy="1554480"/>
           </a:xfrm>
           <a:prstGeom prst="rect">
             <a:avLst/>
@@ -7297,7 +7297,7 @@
         </p:nvSpPr>
         <p:spPr>
           <a:xfrm>
-            <a:off x="3291840" y="3017520"/>
+            <a:off x="3383280" y="3017520"/>
             <a:ext cx="54864" cy="1554480"/>
           </a:xfrm>
           <a:prstGeom prst="rect">
@@ -7317,8 +7317,8 @@
         </p:nvSpPr>
         <p:spPr>
           <a:xfrm>
-            <a:off x="3474720" y="3154680"/>
-            <a:ext cx="2286000" cy="365760"/>
+            <a:off x="3566160" y="3154680"/>
+            <a:ext cx="2194560" cy="365760"/>
           </a:xfrm>
           <a:prstGeom prst="rect">
             <a:avLst/>
@@ -7356,8 +7356,8 @@
         </p:nvSpPr>
         <p:spPr>
           <a:xfrm>
-            <a:off x="3474720" y="3566160"/>
-            <a:ext cx="2286000" cy="822960"/>
+            <a:off x="3566160" y="3566160"/>
+            <a:ext cx="2194560" cy="822960"/>
           </a:xfrm>
           <a:prstGeom prst="rect">
             <a:avLst/>
@@ -7412,8 +7412,8 @@
         </p:nvSpPr>
         <p:spPr>
           <a:xfrm>
-            <a:off x="6126480" y="3017520"/>
-            <a:ext cx="2651760" cy="1554480"/>
+            <a:off x="6309360" y="3017520"/>
+            <a:ext cx="2560320" cy="1554480"/>
           </a:xfrm>
           <a:prstGeom prst="rect">
             <a:avLst/>
@@ -7444,7 +7444,7 @@
         </p:nvSpPr>
         <p:spPr>
           <a:xfrm>
-            <a:off x="6126480" y="3017520"/>
+            <a:off x="6309360" y="3017520"/>
             <a:ext cx="54864" cy="1554480"/>
           </a:xfrm>
           <a:prstGeom prst="rect">
@@ -7464,8 +7464,8 @@
         </p:nvSpPr>
         <p:spPr>
           <a:xfrm>
-            <a:off x="6309360" y="3154680"/>
-            <a:ext cx="2286000" cy="365760"/>
+            <a:off x="6492240" y="3154680"/>
+            <a:ext cx="2194560" cy="365760"/>
           </a:xfrm>
           <a:prstGeom prst="rect">
             <a:avLst/>
@@ -7503,8 +7503,8 @@
         </p:nvSpPr>
         <p:spPr>
           <a:xfrm>
-            <a:off x="6309360" y="3566160"/>
-            <a:ext cx="2286000" cy="822960"/>
+            <a:off x="6492240" y="3566160"/>
+            <a:ext cx="2194560" cy="822960"/>
           </a:xfrm>
           <a:prstGeom prst="rect">
             <a:avLst/>
